--- a/curso_es/pptx/S64.pptx
+++ b/curso_es/pptx/S64.pptx
@@ -4026,7 +4026,7 @@
                 </a:solidFill>
                 <a:latin typeface="Fredoka"/>
               </a:rPr>
-              <a:t>Caso 2 · La cuadrilla de Naiara</a:t>
+              <a:t>Caso 2 · Una cuadrilla</a:t>
             </a:r>
           </a:p>
         </p:txBody>
@@ -4108,7 +4108,7 @@
                 </a:solidFill>
                 <a:latin typeface="Nunito Sans"/>
               </a:rPr>
-              <a:t>Naiara y cinco amigas quedan cada sábado. Yasmin organiza los planes. Tienen una regla: lo que se cuenta en la cuadrilla no sale de ahí.</a:t>
+              <a:t>Una chica y cinco amigas quedan cada sábado. Una de ellas organiza los planes. Tienen una regla: lo que se cuenta en la cuadrilla no sale de ahí.</a:t>
             </a:r>
           </a:p>
         </p:txBody>
@@ -4206,7 +4206,7 @@
                 </a:solidFill>
                 <a:latin typeface="Nunito Sans"/>
               </a:rPr>
-              <a:t>¿Normas y roles? Sí: una norma no escrita, y Yasmin tiene el rol de organizar.</a:t>
+              <a:t>¿Normas y roles? Sí: una norma no escrita, y una de ellas tiene el rol de organizar.</a:t>
             </a:r>
           </a:p>
           <a:p>
@@ -4726,7 +4726,7 @@
                 </a:solidFill>
                 <a:latin typeface="Nunito Sans"/>
               </a:rPr>
-              <a:t>Omar, Chen y cuatro más juegan juntos online cada tarde desde hace dos años. Nunca se han visto en persona.</a:t>
+              <a:t>Un chico, otro chico y cuatro más juegan juntos online cada tarde desde hace dos años. Nunca se han visto en persona.</a:t>
             </a:r>
           </a:p>
         </p:txBody>
@@ -4824,7 +4824,7 @@
                 </a:solidFill>
                 <a:latin typeface="Nunito Sans"/>
               </a:rPr>
-              <a:t>Pero se relacionan cada día, quieren ganar juntos, tienen normas y roles: Chen es el que cura.</a:t>
+              <a:t>Pero se relacionan cada día, quieren ganar juntos, tienen normas y roles: uno es el que cura.</a:t>
             </a:r>
           </a:p>
           <a:p>
